--- a/assets/template_lmu.pptx
+++ b/assets/template_lmu.pptx
@@ -413,7 +413,7 @@
             <a:fld id="{C0D80282-B9AD-46AC-8F7B-174883973D43}" type="datetimeFigureOut">
               <a:rPr lang="de-DE" smtClean="0"/>
               <a:pPr/>
-              <a:t>01.07.2026</a:t>
+              <a:t>07.07.2026</a:t>
             </a:fld>
             <a:endParaRPr lang="de-DE"/>
           </a:p>
@@ -639,7 +639,7 @@
           <a:p>
             <a:fld id="{C0D80282-B9AD-46AC-8F7B-174883973D43}" type="datetimeFigureOut">
               <a:rPr lang="de-DE" smtClean="0"/>
-              <a:t>01.07.2026</a:t>
+              <a:t>07.07.2026</a:t>
             </a:fld>
             <a:endParaRPr lang="de-DE"/>
           </a:p>
@@ -849,7 +849,7 @@
           <a:p>
             <a:fld id="{C0D80282-B9AD-46AC-8F7B-174883973D43}" type="datetimeFigureOut">
               <a:rPr lang="de-DE" smtClean="0"/>
-              <a:t>01.07.2026</a:t>
+              <a:t>07.07.2026</a:t>
             </a:fld>
             <a:endParaRPr lang="de-DE"/>
           </a:p>
@@ -1080,7 +1080,7 @@
           <a:p>
             <a:fld id="{C0D80282-B9AD-46AC-8F7B-174883973D43}" type="datetimeFigureOut">
               <a:rPr lang="de-DE" smtClean="0"/>
-              <a:t>01.07.2026</a:t>
+              <a:t>07.07.2026</a:t>
             </a:fld>
             <a:endParaRPr lang="de-DE"/>
           </a:p>
@@ -1396,7 +1396,7 @@
           <a:p>
             <a:fld id="{C0D80282-B9AD-46AC-8F7B-174883973D43}" type="datetimeFigureOut">
               <a:rPr lang="de-DE" smtClean="0"/>
-              <a:t>01.07.2026</a:t>
+              <a:t>07.07.2026</a:t>
             </a:fld>
             <a:endParaRPr lang="de-DE"/>
           </a:p>
@@ -1727,7 +1727,7 @@
           <a:p>
             <a:fld id="{C0D80282-B9AD-46AC-8F7B-174883973D43}" type="datetimeFigureOut">
               <a:rPr lang="de-DE" smtClean="0"/>
-              <a:t>01.07.2026</a:t>
+              <a:t>07.07.2026</a:t>
             </a:fld>
             <a:endParaRPr lang="de-DE"/>
           </a:p>
@@ -2062,7 +2062,7 @@
           <a:p>
             <a:fld id="{C0D80282-B9AD-46AC-8F7B-174883973D43}" type="datetimeFigureOut">
               <a:rPr lang="de-DE" smtClean="0"/>
-              <a:t>01.07.2026</a:t>
+              <a:t>07.07.2026</a:t>
             </a:fld>
             <a:endParaRPr lang="de-DE"/>
           </a:p>
@@ -2601,7 +2601,7 @@
           <a:p>
             <a:fld id="{C0D80282-B9AD-46AC-8F7B-174883973D43}" type="datetimeFigureOut">
               <a:rPr lang="de-DE" smtClean="0"/>
-              <a:t>01.07.2026</a:t>
+              <a:t>07.07.2026</a:t>
             </a:fld>
             <a:endParaRPr lang="de-DE"/>
           </a:p>
@@ -2754,7 +2754,7 @@
           <a:p>
             <a:fld id="{C0D80282-B9AD-46AC-8F7B-174883973D43}" type="datetimeFigureOut">
               <a:rPr lang="de-DE" smtClean="0"/>
-              <a:t>01.07.2026</a:t>
+              <a:t>07.07.2026</a:t>
             </a:fld>
             <a:endParaRPr lang="de-DE"/>
           </a:p>
@@ -2933,7 +2933,7 @@
           <a:p>
             <a:fld id="{C0D80282-B9AD-46AC-8F7B-174883973D43}" type="datetimeFigureOut">
               <a:rPr lang="de-DE" smtClean="0"/>
-              <a:t>01.07.2026</a:t>
+              <a:t>07.07.2026</a:t>
             </a:fld>
             <a:endParaRPr lang="de-DE"/>
           </a:p>
@@ -3222,7 +3222,7 @@
           <a:p>
             <a:fld id="{C0D80282-B9AD-46AC-8F7B-174883973D43}" type="datetimeFigureOut">
               <a:rPr lang="de-DE" smtClean="0"/>
-              <a:t>01.07.2026</a:t>
+              <a:t>07.07.2026</a:t>
             </a:fld>
             <a:endParaRPr lang="de-DE"/>
           </a:p>
@@ -3465,7 +3465,7 @@
           <a:p>
             <a:fld id="{C0D80282-B9AD-46AC-8F7B-174883973D43}" type="datetimeFigureOut">
               <a:rPr lang="de-DE" smtClean="0"/>
-              <a:t>01.07.2026</a:t>
+              <a:t>07.07.2026</a:t>
             </a:fld>
             <a:endParaRPr lang="de-DE"/>
           </a:p>
@@ -3956,7 +3956,7 @@
 <file path=ppt/theme/theme1.xml><?xml version="1.0" encoding="utf-8"?>
 <a:theme xmlns:a="http://schemas.openxmlformats.org/drawingml/2006/main" name="Office Theme">
   <a:themeElements>
-    <a:clrScheme name="Office">
+    <a:clrScheme name="Custom 1">
       <a:dk1>
         <a:sysClr val="windowText" lastClr="000000"/>
       </a:dk1>
@@ -3970,7 +3970,7 @@
         <a:srgbClr val="E8E8E8"/>
       </a:lt2>
       <a:accent1>
-        <a:srgbClr val="156082"/>
+        <a:srgbClr val="3A7D22"/>
       </a:accent1>
       <a:accent2>
         <a:srgbClr val="E97132"/>
